--- a/Sports screen report generator script map.pptx
+++ b/Sports screen report generator script map.pptx
@@ -6,7 +6,8 @@
   </p:sldMasterIdLst>
   <p:sldIdLst>
     <p:sldId id="256" r:id="rId2"/>
-    <p:sldId id="257" r:id="rId3"/>
+    <p:sldId id="258" r:id="rId3"/>
+    <p:sldId id="257" r:id="rId4"/>
   </p:sldIdLst>
   <p:sldSz cx="12192000" cy="6858000"/>
   <p:notesSz cx="6858000" cy="9144000"/>
@@ -105,6 +106,11 @@
       </a:defRPr>
     </a:lvl9pPr>
   </p:defaultTextStyle>
+  <p:extLst>
+    <p:ext uri="{EFAFB233-063F-42B5-8137-9DF3F51BA10A}">
+      <p15:sldGuideLst xmlns:p15="http://schemas.microsoft.com/office/powerpoint/2012/main"/>
+    </p:ext>
+  </p:extLst>
 </p:presentation>
 </file>
 
@@ -255,7 +261,7 @@
           <a:p>
             <a:fld id="{FDAD4BF0-003A-436D-8441-51F509AD7960}" type="datetimeFigureOut">
               <a:rPr lang="en-US" smtClean="0"/>
-              <a:t>7/21/2026</a:t>
+              <a:t>7/22/2026</a:t>
             </a:fld>
             <a:endParaRPr lang="en-US"/>
           </a:p>
@@ -453,7 +459,7 @@
           <a:p>
             <a:fld id="{FDAD4BF0-003A-436D-8441-51F509AD7960}" type="datetimeFigureOut">
               <a:rPr lang="en-US" smtClean="0"/>
-              <a:t>7/21/2026</a:t>
+              <a:t>7/22/2026</a:t>
             </a:fld>
             <a:endParaRPr lang="en-US"/>
           </a:p>
@@ -661,7 +667,7 @@
           <a:p>
             <a:fld id="{FDAD4BF0-003A-436D-8441-51F509AD7960}" type="datetimeFigureOut">
               <a:rPr lang="en-US" smtClean="0"/>
-              <a:t>7/21/2026</a:t>
+              <a:t>7/22/2026</a:t>
             </a:fld>
             <a:endParaRPr lang="en-US"/>
           </a:p>
@@ -859,7 +865,7 @@
           <a:p>
             <a:fld id="{FDAD4BF0-003A-436D-8441-51F509AD7960}" type="datetimeFigureOut">
               <a:rPr lang="en-US" smtClean="0"/>
-              <a:t>7/21/2026</a:t>
+              <a:t>7/22/2026</a:t>
             </a:fld>
             <a:endParaRPr lang="en-US"/>
           </a:p>
@@ -1134,7 +1140,7 @@
           <a:p>
             <a:fld id="{FDAD4BF0-003A-436D-8441-51F509AD7960}" type="datetimeFigureOut">
               <a:rPr lang="en-US" smtClean="0"/>
-              <a:t>7/21/2026</a:t>
+              <a:t>7/22/2026</a:t>
             </a:fld>
             <a:endParaRPr lang="en-US"/>
           </a:p>
@@ -1399,7 +1405,7 @@
           <a:p>
             <a:fld id="{FDAD4BF0-003A-436D-8441-51F509AD7960}" type="datetimeFigureOut">
               <a:rPr lang="en-US" smtClean="0"/>
-              <a:t>7/21/2026</a:t>
+              <a:t>7/22/2026</a:t>
             </a:fld>
             <a:endParaRPr lang="en-US"/>
           </a:p>
@@ -1811,7 +1817,7 @@
           <a:p>
             <a:fld id="{FDAD4BF0-003A-436D-8441-51F509AD7960}" type="datetimeFigureOut">
               <a:rPr lang="en-US" smtClean="0"/>
-              <a:t>7/21/2026</a:t>
+              <a:t>7/22/2026</a:t>
             </a:fld>
             <a:endParaRPr lang="en-US"/>
           </a:p>
@@ -1952,7 +1958,7 @@
           <a:p>
             <a:fld id="{FDAD4BF0-003A-436D-8441-51F509AD7960}" type="datetimeFigureOut">
               <a:rPr lang="en-US" smtClean="0"/>
-              <a:t>7/21/2026</a:t>
+              <a:t>7/22/2026</a:t>
             </a:fld>
             <a:endParaRPr lang="en-US"/>
           </a:p>
@@ -2065,7 +2071,7 @@
           <a:p>
             <a:fld id="{FDAD4BF0-003A-436D-8441-51F509AD7960}" type="datetimeFigureOut">
               <a:rPr lang="en-US" smtClean="0"/>
-              <a:t>7/21/2026</a:t>
+              <a:t>7/22/2026</a:t>
             </a:fld>
             <a:endParaRPr lang="en-US"/>
           </a:p>
@@ -2376,7 +2382,7 @@
           <a:p>
             <a:fld id="{FDAD4BF0-003A-436D-8441-51F509AD7960}" type="datetimeFigureOut">
               <a:rPr lang="en-US" smtClean="0"/>
-              <a:t>7/21/2026</a:t>
+              <a:t>7/22/2026</a:t>
             </a:fld>
             <a:endParaRPr lang="en-US"/>
           </a:p>
@@ -2664,7 +2670,7 @@
           <a:p>
             <a:fld id="{FDAD4BF0-003A-436D-8441-51F509AD7960}" type="datetimeFigureOut">
               <a:rPr lang="en-US" smtClean="0"/>
-              <a:t>7/21/2026</a:t>
+              <a:t>7/22/2026</a:t>
             </a:fld>
             <a:endParaRPr lang="en-US"/>
           </a:p>
@@ -2905,7 +2911,7 @@
           <a:p>
             <a:fld id="{FDAD4BF0-003A-436D-8441-51F509AD7960}" type="datetimeFigureOut">
               <a:rPr lang="en-US" smtClean="0"/>
-              <a:t>7/21/2026</a:t>
+              <a:t>7/22/2026</a:t>
             </a:fld>
             <a:endParaRPr lang="en-US"/>
           </a:p>
@@ -3408,6 +3414,399 @@
           <a:chExt cx="0" cy="0"/>
         </a:xfrm>
       </p:grpSpPr>
+      <p:sp>
+        <p:nvSpPr>
+          <p:cNvPr id="2" name="TextBox 1">
+            <a:extLst>
+              <a:ext uri="{FF2B5EF4-FFF2-40B4-BE49-F238E27FC236}">
+                <a16:creationId xmlns:a16="http://schemas.microsoft.com/office/drawing/2014/main" id="{735417A6-6A6E-1A56-BFCE-4B5188838B93}"/>
+              </a:ext>
+            </a:extLst>
+          </p:cNvPr>
+          <p:cNvSpPr txBox="1"/>
+          <p:nvPr/>
+        </p:nvSpPr>
+        <p:spPr>
+          <a:xfrm>
+            <a:off x="521208" y="310896"/>
+            <a:ext cx="6739128" cy="7017306"/>
+          </a:xfrm>
+          <a:prstGeom prst="rect">
+            <a:avLst/>
+          </a:prstGeom>
+          <a:noFill/>
+        </p:spPr>
+        <p:txBody>
+          <a:bodyPr wrap="square" rtlCol="0">
+            <a:spAutoFit/>
+          </a:bodyPr>
+          <a:lstStyle/>
+          <a:p>
+            <a:pPr marL="342900" indent="-342900">
+              <a:buAutoNum type="arabicPeriod"/>
+            </a:pPr>
+            <a:r>
+              <a:rPr lang="en-US" dirty="0"/>
+              <a:t>Enter patient info</a:t>
+            </a:r>
+          </a:p>
+          <a:p>
+            <a:pPr marL="342900" indent="-342900">
+              <a:buAutoNum type="arabicPeriod"/>
+            </a:pPr>
+            <a:r>
+              <a:rPr lang="en-US" dirty="0"/>
+              <a:t>Enter clinical info</a:t>
+            </a:r>
+          </a:p>
+          <a:p>
+            <a:pPr marL="342900" indent="-342900">
+              <a:buAutoNum type="arabicPeriod"/>
+            </a:pPr>
+            <a:r>
+              <a:rPr lang="en-US" dirty="0"/>
+              <a:t>Click “Save &amp; Load GCD data”</a:t>
+            </a:r>
+          </a:p>
+          <a:p>
+            <a:pPr marL="800100" lvl="1" indent="-342900">
+              <a:buFont typeface="+mj-lt"/>
+              <a:buAutoNum type="alphaLcPeriod"/>
+            </a:pPr>
+            <a:r>
+              <a:rPr lang="en-US" dirty="0"/>
+              <a:t>Patient info saved automatically</a:t>
+            </a:r>
+          </a:p>
+          <a:p>
+            <a:pPr marL="800100" lvl="1" indent="-342900">
+              <a:buFont typeface="+mj-lt"/>
+              <a:buAutoNum type="alphaLcPeriod"/>
+            </a:pPr>
+            <a:r>
+              <a:rPr lang="en-US" dirty="0" err="1"/>
+              <a:t>load_data</a:t>
+            </a:r>
+            <a:r>
+              <a:rPr lang="en-US" dirty="0"/>
+              <a:t> called</a:t>
+            </a:r>
+          </a:p>
+          <a:p>
+            <a:pPr marL="1257300" lvl="2" indent="-342900">
+              <a:buFont typeface="+mj-lt"/>
+              <a:buAutoNum type="romanLcPeriod"/>
+            </a:pPr>
+            <a:r>
+              <a:rPr lang="en-US" dirty="0" err="1"/>
+              <a:t>load_create_patient_data</a:t>
+            </a:r>
+            <a:r>
+              <a:rPr lang="en-US" dirty="0"/>
+              <a:t> called</a:t>
+            </a:r>
+          </a:p>
+          <a:p>
+            <a:pPr marL="1771650" lvl="3" indent="-400050">
+              <a:buFont typeface="Arial" panose="020B0604020202020204" pitchFamily="34" charset="0"/>
+              <a:buChar char="•"/>
+            </a:pPr>
+            <a:r>
+              <a:rPr lang="en-US" dirty="0"/>
+              <a:t>Creates patient folder if one doesn’t exist</a:t>
+            </a:r>
+          </a:p>
+          <a:p>
+            <a:pPr marL="1771650" lvl="3" indent="-400050">
+              <a:buFont typeface="Arial" panose="020B0604020202020204" pitchFamily="34" charset="0"/>
+              <a:buChar char="•"/>
+            </a:pPr>
+            <a:r>
+              <a:rPr lang="en-US" dirty="0"/>
+              <a:t>Loads parquet files if they exist</a:t>
+            </a:r>
+          </a:p>
+          <a:p>
+            <a:pPr marL="1771650" lvl="3" indent="-400050">
+              <a:buFont typeface="Arial" panose="020B0604020202020204" pitchFamily="34" charset="0"/>
+              <a:buChar char="•"/>
+            </a:pPr>
+            <a:r>
+              <a:rPr lang="en-US" dirty="0"/>
+              <a:t>Returns </a:t>
+            </a:r>
+            <a:r>
+              <a:rPr lang="en-US" dirty="0" err="1"/>
+              <a:t>session_dict</a:t>
+            </a:r>
+            <a:r>
+              <a:rPr lang="en-US" dirty="0"/>
+              <a:t> with all relevant info</a:t>
+            </a:r>
+          </a:p>
+          <a:p>
+            <a:pPr marL="1314450" lvl="2" indent="-400050">
+              <a:buFont typeface="+mj-lt"/>
+              <a:buAutoNum type="romanLcPeriod"/>
+            </a:pPr>
+            <a:r>
+              <a:rPr lang="en-US" dirty="0" err="1"/>
+              <a:t>getData_dialog</a:t>
+            </a:r>
+            <a:r>
+              <a:rPr lang="en-US" dirty="0"/>
+              <a:t> called</a:t>
+            </a:r>
+          </a:p>
+          <a:p>
+            <a:pPr marL="1771650" lvl="3" indent="-400050">
+              <a:buFont typeface="Arial" panose="020B0604020202020204" pitchFamily="34" charset="0"/>
+              <a:buChar char="•"/>
+            </a:pPr>
+            <a:r>
+              <a:rPr lang="en-US" dirty="0"/>
+              <a:t>Opens file explorer to select data</a:t>
+            </a:r>
+          </a:p>
+          <a:p>
+            <a:pPr marL="1771650" lvl="3" indent="-400050">
+              <a:buFont typeface="Arial" panose="020B0604020202020204" pitchFamily="34" charset="0"/>
+              <a:buChar char="•"/>
+            </a:pPr>
+            <a:r>
+              <a:rPr lang="en-US" dirty="0"/>
+              <a:t>Checks if date </a:t>
+            </a:r>
+            <a:r>
+              <a:rPr lang="en-US" dirty="0" err="1"/>
+              <a:t>exisits</a:t>
+            </a:r>
+            <a:r>
+              <a:rPr lang="en-US" dirty="0"/>
+              <a:t> for data in </a:t>
+            </a:r>
+            <a:r>
+              <a:rPr lang="en-US" dirty="0" err="1"/>
+              <a:t>session_dict</a:t>
+            </a:r>
+            <a:endParaRPr lang="en-US" dirty="0"/>
+          </a:p>
+          <a:p>
+            <a:pPr marL="1771650" lvl="3" indent="-400050">
+              <a:buFont typeface="Arial" panose="020B0604020202020204" pitchFamily="34" charset="0"/>
+              <a:buChar char="•"/>
+            </a:pPr>
+            <a:r>
+              <a:rPr lang="en-US" dirty="0">
+                <a:solidFill>
+                  <a:srgbClr val="FF0000"/>
+                </a:solidFill>
+              </a:rPr>
+              <a:t>If data exists – either:</a:t>
+            </a:r>
+          </a:p>
+          <a:p>
+            <a:pPr marL="2228850" lvl="4" indent="-400050">
+              <a:buFont typeface="Arial" panose="020B0604020202020204" pitchFamily="34" charset="0"/>
+              <a:buChar char="•"/>
+            </a:pPr>
+            <a:r>
+              <a:rPr lang="en-US" dirty="0">
+                <a:solidFill>
+                  <a:srgbClr val="FF0000"/>
+                </a:solidFill>
+              </a:rPr>
+              <a:t>pull </a:t>
+            </a:r>
+            <a:r>
+              <a:rPr lang="en-US" dirty="0" err="1">
+                <a:solidFill>
+                  <a:srgbClr val="FF0000"/>
+                </a:solidFill>
+              </a:rPr>
+              <a:t>gcd</a:t>
+            </a:r>
+            <a:r>
+              <a:rPr lang="en-US" dirty="0">
+                <a:solidFill>
+                  <a:srgbClr val="FF0000"/>
+                </a:solidFill>
+              </a:rPr>
+              <a:t> data and return in </a:t>
+            </a:r>
+            <a:r>
+              <a:rPr lang="en-US" dirty="0" err="1">
+                <a:solidFill>
+                  <a:srgbClr val="FF0000"/>
+                </a:solidFill>
+              </a:rPr>
+              <a:t>gcd_data</a:t>
+            </a:r>
+            <a:endParaRPr lang="en-US" dirty="0">
+              <a:solidFill>
+                <a:srgbClr val="FF0000"/>
+              </a:solidFill>
+            </a:endParaRPr>
+          </a:p>
+          <a:p>
+            <a:pPr marL="2228850" lvl="4" indent="-400050">
+              <a:buFont typeface="Arial" panose="020B0604020202020204" pitchFamily="34" charset="0"/>
+              <a:buChar char="•"/>
+            </a:pPr>
+            <a:r>
+              <a:rPr lang="en-US" dirty="0">
+                <a:solidFill>
+                  <a:srgbClr val="FF0000"/>
+                </a:solidFill>
+              </a:rPr>
+              <a:t>OR, return empty </a:t>
+            </a:r>
+            <a:r>
+              <a:rPr lang="en-US" dirty="0" err="1">
+                <a:solidFill>
+                  <a:srgbClr val="FF0000"/>
+                </a:solidFill>
+              </a:rPr>
+              <a:t>gcd_data</a:t>
+            </a:r>
+            <a:endParaRPr lang="en-US" dirty="0"/>
+          </a:p>
+          <a:p>
+            <a:pPr marL="1771650" lvl="3" indent="-400050">
+              <a:buFont typeface="Arial" panose="020B0604020202020204" pitchFamily="34" charset="0"/>
+              <a:buChar char="•"/>
+            </a:pPr>
+            <a:r>
+              <a:rPr lang="en-US" dirty="0">
+                <a:solidFill>
+                  <a:srgbClr val="FF0000"/>
+                </a:solidFill>
+              </a:rPr>
+              <a:t>If data doesn’t exist</a:t>
+            </a:r>
+            <a:r>
+              <a:rPr lang="en-US" dirty="0"/>
+              <a:t>, loads </a:t>
+            </a:r>
+            <a:r>
+              <a:rPr lang="en-US" dirty="0" err="1"/>
+              <a:t>gcd</a:t>
+            </a:r>
+            <a:r>
+              <a:rPr lang="en-US" dirty="0"/>
+              <a:t> data and returns in </a:t>
+            </a:r>
+            <a:r>
+              <a:rPr lang="en-US" dirty="0" err="1"/>
+              <a:t>gcd_data</a:t>
+            </a:r>
+            <a:endParaRPr lang="en-US" dirty="0"/>
+          </a:p>
+          <a:p>
+            <a:pPr marL="1314450" lvl="2" indent="-400050">
+              <a:buFont typeface="+mj-lt"/>
+              <a:buAutoNum type="romanLcPeriod"/>
+            </a:pPr>
+            <a:r>
+              <a:rPr lang="en-US" dirty="0"/>
+              <a:t>If </a:t>
+            </a:r>
+            <a:r>
+              <a:rPr lang="en-US" dirty="0" err="1"/>
+              <a:t>gcd</a:t>
+            </a:r>
+            <a:r>
+              <a:rPr lang="en-US" dirty="0"/>
+              <a:t> data pulled</a:t>
+            </a:r>
+          </a:p>
+          <a:p>
+            <a:pPr marL="1771650" lvl="3" indent="-400050">
+              <a:buFont typeface="Arial" panose="020B0604020202020204" pitchFamily="34" charset="0"/>
+              <a:buChar char="•"/>
+            </a:pPr>
+            <a:r>
+              <a:rPr lang="en-US" dirty="0" err="1"/>
+              <a:t>Parse_gcdData</a:t>
+            </a:r>
+            <a:r>
+              <a:rPr lang="en-US" dirty="0"/>
+              <a:t> called and single/series </a:t>
+            </a:r>
+            <a:r>
+              <a:rPr lang="en-US" dirty="0" err="1"/>
+              <a:t>df’s</a:t>
+            </a:r>
+            <a:r>
+              <a:rPr lang="en-US" dirty="0"/>
+              <a:t> returned</a:t>
+            </a:r>
+          </a:p>
+          <a:p>
+            <a:pPr marL="1314450" lvl="2" indent="-400050">
+              <a:buFont typeface="+mj-lt"/>
+              <a:buAutoNum type="romanLcPeriod"/>
+            </a:pPr>
+            <a:endParaRPr lang="en-US" dirty="0"/>
+          </a:p>
+          <a:p>
+            <a:pPr marL="1771650" lvl="3" indent="-400050">
+              <a:buFont typeface="Arial" panose="020B0604020202020204" pitchFamily="34" charset="0"/>
+              <a:buChar char="•"/>
+            </a:pPr>
+            <a:endParaRPr lang="en-US" dirty="0"/>
+          </a:p>
+          <a:p>
+            <a:pPr marL="857250" lvl="1" indent="-400050">
+              <a:buFont typeface="+mj-lt"/>
+              <a:buAutoNum type="alphaLcPeriod"/>
+            </a:pPr>
+            <a:endParaRPr lang="en-US" dirty="0"/>
+          </a:p>
+          <a:p>
+            <a:pPr marL="800100" lvl="1" indent="-342900">
+              <a:buAutoNum type="alphaLcPeriod"/>
+            </a:pPr>
+            <a:endParaRPr lang="en-US" dirty="0"/>
+          </a:p>
+          <a:p>
+            <a:pPr marL="342900" indent="-342900">
+              <a:buAutoNum type="arabicPeriod"/>
+            </a:pPr>
+            <a:endParaRPr lang="en-US" dirty="0"/>
+          </a:p>
+        </p:txBody>
+      </p:sp>
+    </p:spTree>
+    <p:extLst>
+      <p:ext uri="{BB962C8B-B14F-4D97-AF65-F5344CB8AC3E}">
+        <p14:creationId xmlns:p14="http://schemas.microsoft.com/office/powerpoint/2010/main" val="4083652081"/>
+      </p:ext>
+    </p:extLst>
+  </p:cSld>
+  <p:clrMapOvr>
+    <a:masterClrMapping/>
+  </p:clrMapOvr>
+</p:sld>
+</file>
+
+<file path=ppt/slides/slide3.xml><?xml version="1.0" encoding="utf-8"?>
+<p:sld xmlns:a="http://schemas.openxmlformats.org/drawingml/2006/main" xmlns:r="http://schemas.openxmlformats.org/officeDocument/2006/relationships" xmlns:p="http://schemas.openxmlformats.org/presentationml/2006/main">
+  <p:cSld>
+    <p:spTree>
+      <p:nvGrpSpPr>
+        <p:cNvPr id="1" name=""/>
+        <p:cNvGrpSpPr/>
+        <p:nvPr/>
+      </p:nvGrpSpPr>
+      <p:grpSpPr>
+        <a:xfrm>
+          <a:off x="0" y="0"/>
+          <a:ext cx="0" cy="0"/>
+          <a:chOff x="0" y="0"/>
+          <a:chExt cx="0" cy="0"/>
+        </a:xfrm>
+      </p:grpSpPr>
       <p:pic>
         <p:nvPicPr>
           <p:cNvPr id="4" name="Picture 3">
@@ -3675,7 +4074,7 @@
           </a:xfrm>
           <a:prstGeom prst="bentConnector3">
             <a:avLst>
-              <a:gd name="adj1" fmla="val 50000"/>
+              <a:gd name="adj1" fmla="val 91926"/>
             </a:avLst>
           </a:prstGeom>
           <a:ln w="28575">
